--- a/site/clases/parte-3-estadistica-inferencial/176-test-t-una-muestra-dos-muestras-pareado/clase-176-test-t-una-muestra-dos-muestras-pareado-presentacion.pptx
+++ b/site/clases/parte-3-estadistica-inferencial/176-test-t-una-muestra-dos-muestras-pareado/clase-176-test-t-una-muestra-dos-muestras-pareado-presentacion.pptx
@@ -3272,7 +3272,7 @@
                 </a:solidFill>
                 <a:latin typeface="Segoe UI"/>
               </a:rPr>
-              <a:t>Parte: 3 — Estadística Inferencial y Causal · Fuente: ISLP, cap. 13 + Bruce &amp; Bruce, cap. 3 Statistical Experiments and Significance Testing.  Duración estimada: 80 min.</a:t>
+              <a:t>Parte: 3 — Estadística Inferencial y Causal · Fuente: ISLP, cap. 13 + Bruce &amp; Bruce, cap. 3 Statistical Experiments and Significance Testing.  Duración estimada: 80 min. · Nivel: Intermedio-Avanzado</a:t>
             </a:r>
           </a:p>
         </p:txBody>
@@ -3581,7 +3581,7 @@
                 </a:solidFill>
                 <a:latin typeface="Segoe UI"/>
               </a:rPr>
-              <a:t>Parte: 3 — Estadística Inferencial y Causal · Fuente: ISLP, cap. 13 + Bruce &amp; Bruce, cap. 3 Statistical Experiments and Significance Testing.  Duración estimada: 80 min.</a:t>
+              <a:t>Parte: 3 — Estadística Inferencial y Causal · Fuente: ISLP, cap. 13 + Bruce &amp; Bruce, cap. 3 Statistical Experiments and Significance Testing.  Duración estimada: 80 min. · Nivel: Intermedio-Avanzado</a:t>
             </a:r>
           </a:p>
         </p:txBody>
@@ -4845,7 +4845,7 @@
                 </a:solidFill>
                 <a:latin typeface="Segoe UI"/>
               </a:rPr>
-              <a:t>Primer bloque ejecutable del notebook.</a:t>
+              <a:t>H₀: μ = 20 vs H₁: μ ≠ 20. El IC95 % y el p-value son la misma información: si el IC excluye 20, se rechaza H₀.</a:t>
             </a:r>
           </a:p>
         </p:txBody>
@@ -4932,7 +4932,254 @@
                 </a:solidFill>
                 <a:latin typeface="Courier New"/>
               </a:rPr>
-              <a:t># Imports y configuración inicial</a:t>
+              <a:t>import numpy as np</a:t>
+            </a:r>
+          </a:p>
+          <a:p>
+            <a:pPr>
+              <a:defRPr sz="1200" b="0">
+                <a:solidFill>
+                  <a:srgbClr val="F8FAFC"/>
+                </a:solidFill>
+                <a:latin typeface="Courier New"/>
+              </a:defRPr>
+            </a:pPr>
+            <a:r>
+              <a:rPr sz="1200" b="0">
+                <a:solidFill>
+                  <a:srgbClr val="F8FAFC"/>
+                </a:solidFill>
+                <a:latin typeface="Courier New"/>
+              </a:rPr>
+              <a:t>from scipy import stats</a:t>
+            </a:r>
+          </a:p>
+          <a:p>
+            <a:pPr>
+              <a:defRPr sz="1200" b="0">
+                <a:solidFill>
+                  <a:srgbClr val="F8FAFC"/>
+                </a:solidFill>
+                <a:latin typeface="Courier New"/>
+              </a:defRPr>
+            </a:pPr>
+            <a:r>
+              <a:rPr sz="1200" b="0">
+                <a:solidFill>
+                  <a:srgbClr val="F8FAFC"/>
+                </a:solidFill>
+                <a:latin typeface="Courier New"/>
+              </a:rPr>
+              <a:t>import matplotlib.pyplot as plt</a:t>
+            </a:r>
+          </a:p>
+          <a:p>
+            <a:pPr>
+              <a:defRPr sz="1200" b="0">
+                <a:solidFill>
+                  <a:srgbClr val="F8FAFC"/>
+                </a:solidFill>
+                <a:latin typeface="Courier New"/>
+              </a:defRPr>
+            </a:pPr>
+            <a:r>
+              <a:rPr sz="1200" b="0">
+                <a:solidFill>
+                  <a:srgbClr val="F8FAFC"/>
+                </a:solidFill>
+                <a:latin typeface="Courier New"/>
+              </a:rPr>
+              <a:t> </a:t>
+            </a:r>
+          </a:p>
+          <a:p>
+            <a:pPr>
+              <a:defRPr sz="1200" b="0">
+                <a:solidFill>
+                  <a:srgbClr val="F8FAFC"/>
+                </a:solidFill>
+                <a:latin typeface="Courier New"/>
+              </a:defRPr>
+            </a:pPr>
+            <a:r>
+              <a:rPr sz="1200" b="0">
+                <a:solidFill>
+                  <a:srgbClr val="F8FAFC"/>
+                </a:solidFill>
+                <a:latin typeface="Courier New"/>
+              </a:rPr>
+              <a:t>rng = np.random.default_rng(42)</a:t>
+            </a:r>
+          </a:p>
+          <a:p>
+            <a:pPr>
+              <a:defRPr sz="1200" b="0">
+                <a:solidFill>
+                  <a:srgbClr val="F8FAFC"/>
+                </a:solidFill>
+                <a:latin typeface="Courier New"/>
+              </a:defRPr>
+            </a:pPr>
+            <a:r>
+              <a:rPr sz="1200" b="0">
+                <a:solidFill>
+                  <a:srgbClr val="F8FAFC"/>
+                </a:solidFill>
+                <a:latin typeface="Courier New"/>
+              </a:rPr>
+              <a:t> </a:t>
+            </a:r>
+          </a:p>
+          <a:p>
+            <a:pPr>
+              <a:defRPr sz="1200" b="0">
+                <a:solidFill>
+                  <a:srgbClr val="F8FAFC"/>
+                </a:solidFill>
+                <a:latin typeface="Courier New"/>
+              </a:defRPr>
+            </a:pPr>
+            <a:r>
+              <a:rPr sz="1200" b="0">
+                <a:solidFill>
+                  <a:srgbClr val="F8FAFC"/>
+                </a:solidFill>
+                <a:latin typeface="Courier New"/>
+              </a:rPr>
+              <a:t>total_bill = rng.normal(21.5, 8, 200)</a:t>
+            </a:r>
+          </a:p>
+          <a:p>
+            <a:pPr>
+              <a:defRPr sz="1200" b="0">
+                <a:solidFill>
+                  <a:srgbClr val="F8FAFC"/>
+                </a:solidFill>
+                <a:latin typeface="Courier New"/>
+              </a:defRPr>
+            </a:pPr>
+            <a:r>
+              <a:rPr sz="1200" b="0">
+                <a:solidFill>
+                  <a:srgbClr val="F8FAFC"/>
+                </a:solidFill>
+                <a:latin typeface="Courier New"/>
+              </a:rPr>
+              <a:t>res = stats.ttest_1samp(total_bill, popmean=20)</a:t>
+            </a:r>
+          </a:p>
+          <a:p>
+            <a:pPr>
+              <a:defRPr sz="1200" b="0">
+                <a:solidFill>
+                  <a:srgbClr val="F8FAFC"/>
+                </a:solidFill>
+                <a:latin typeface="Courier New"/>
+              </a:defRPr>
+            </a:pPr>
+            <a:r>
+              <a:rPr sz="1200" b="0">
+                <a:solidFill>
+                  <a:srgbClr val="F8FAFC"/>
+                </a:solidFill>
+                <a:latin typeface="Courier New"/>
+              </a:rPr>
+              <a:t>ci = res.confidence_interval(0.95)</a:t>
+            </a:r>
+          </a:p>
+          <a:p>
+            <a:pPr>
+              <a:defRPr sz="1200" b="0">
+                <a:solidFill>
+                  <a:srgbClr val="F8FAFC"/>
+                </a:solidFill>
+                <a:latin typeface="Courier New"/>
+              </a:defRPr>
+            </a:pPr>
+            <a:r>
+              <a:rPr sz="1200" b="0">
+                <a:solidFill>
+                  <a:srgbClr val="F8FAFC"/>
+                </a:solidFill>
+                <a:latin typeface="Courier New"/>
+              </a:rPr>
+              <a:t>print("H0: μ=20  vs  H1: μ≠20")</a:t>
+            </a:r>
+          </a:p>
+          <a:p>
+            <a:pPr>
+              <a:defRPr sz="1200" b="0">
+                <a:solidFill>
+                  <a:srgbClr val="F8FAFC"/>
+                </a:solidFill>
+                <a:latin typeface="Courier New"/>
+              </a:defRPr>
+            </a:pPr>
+            <a:r>
+              <a:rPr sz="1200" b="0">
+                <a:solidFill>
+                  <a:srgbClr val="F8FAFC"/>
+                </a:solidFill>
+                <a:latin typeface="Courier New"/>
+              </a:rPr>
+              <a:t>print(f"t={res.statistic:.3f}  p={res.pvalue:.4f}  IC95%=({ci.low:.2f}, {ci.high:.2f})")</a:t>
+            </a:r>
+          </a:p>
+          <a:p>
+            <a:pPr>
+              <a:defRPr sz="1200" b="0">
+                <a:solidFill>
+                  <a:srgbClr val="F8FAFC"/>
+                </a:solidFill>
+                <a:latin typeface="Courier New"/>
+              </a:defRPr>
+            </a:pPr>
+            <a:r>
+              <a:rPr sz="1200" b="0">
+                <a:solidFill>
+                  <a:srgbClr val="F8FAFC"/>
+                </a:solidFill>
+                <a:latin typeface="Courier New"/>
+              </a:rPr>
+              <a:t>print("Rechazo H0" if res.pvalue &lt; 0.05 else "No rechazo H0")</a:t>
+            </a:r>
+          </a:p>
+          <a:p>
+            <a:pPr>
+              <a:defRPr sz="1200" b="0">
+                <a:solidFill>
+                  <a:srgbClr val="F8FAFC"/>
+                </a:solidFill>
+                <a:latin typeface="Courier New"/>
+              </a:defRPr>
+            </a:pPr>
+            <a:r>
+              <a:rPr sz="1200" b="0">
+                <a:solidFill>
+                  <a:srgbClr val="F8FAFC"/>
+                </a:solidFill>
+                <a:latin typeface="Courier New"/>
+              </a:rPr>
+              <a:t>excluye_20 = ci.low &gt; 20 or ci.high &lt; 20</a:t>
+            </a:r>
+          </a:p>
+          <a:p>
+            <a:pPr>
+              <a:defRPr sz="1200" b="0">
+                <a:solidFill>
+                  <a:srgbClr val="F8FAFC"/>
+                </a:solidFill>
+                <a:latin typeface="Courier New"/>
+              </a:defRPr>
+            </a:pPr>
+            <a:r>
+              <a:rPr sz="1200" b="0">
+                <a:solidFill>
+                  <a:srgbClr val="F8FAFC"/>
+                </a:solidFill>
+                <a:latin typeface="Courier New"/>
+              </a:rPr>
+              <a:t>assert (res.pvalue &lt; 0.05) == excluye_20, "p-value e IC deben concordar"</a:t>
             </a:r>
           </a:p>
         </p:txBody>
